--- a/modulo-04/04.01 - Introdução ao SAP S_4HANA Cloud, Extensões e Clean Core/04.01_SAP_S4HANA_Cloud_extensões_e_Clean_Core.pptx
+++ b/modulo-04/04.01 - Introdução ao SAP S_4HANA Cloud, Extensões e Clean Core/04.01_SAP_S4HANA_Cloud_extensões_e_Clean_Core.pptx
@@ -1639,7 +1639,7 @@
                   <a:srgbClr val="8FA3C7"/>
                 </a:solidFill>
               </a:rPr>
-              <a:t>ABAP Moderno · Módulo 05 — Extensibilidade Clean Core  ·  Aula 1 de 5 — Clean Core</a:t>
+              <a:t>ABAP Moderno · Módulo 04 — Extensibilidade Clean Core  ·  Aula 1 de 5 — Clean Core</a:t>
             </a:r>
             <a:endParaRPr lang="en-US" sz="900" dirty="0"/>
           </a:p>
@@ -1785,7 +1785,7 @@
                   <a:srgbClr val="556B82"/>
                 </a:solidFill>
               </a:rPr>
-              <a:t>ABAP Moderno · Módulo 05 — Extensibilidade Clean Core  ·  Aula 1 de 5 — Clean Core</a:t>
+              <a:t>ABAP Moderno · Módulo 04 — Extensibilidade Clean Core  ·  Aula 1 de 5 — Clean Core</a:t>
             </a:r>
             <a:endParaRPr lang="en-US" sz="900" dirty="0"/>
           </a:p>
@@ -2216,7 +2216,7 @@
                   <a:srgbClr val="89D1FF"/>
                 </a:solidFill>
               </a:rPr>
-              <a:t>MÓDULO 05 · AULA 01 DE 05</a:t>
+              <a:t>MÓDULO 04 · AULA 01 DE 05</a:t>
             </a:r>
             <a:endParaRPr lang="en-US" sz="1400" dirty="0"/>
           </a:p>
@@ -2514,7 +2514,7 @@
                   <a:srgbClr val="8FA3C7"/>
                 </a:solidFill>
               </a:rPr>
-              <a:t>ABAP Moderno · Módulo 05 — Extensibilidade Clean Core · Design System SAP Horizon</a:t>
+              <a:t>ABAP Moderno · Módulo 04 — Extensibilidade Clean Core · Design System SAP Horizon</a:t>
             </a:r>
             <a:endParaRPr lang="en-US" sz="1100" dirty="0"/>
           </a:p>
@@ -4257,7 +4257,7 @@
         </p:blipFill>
         <p:spPr>
           <a:xfrm>
-            <a:off x="2622728" y="3241548"/>
+            <a:off x="5446624" y="3241548"/>
             <a:ext cx="329184" cy="329184"/>
           </a:xfrm>
           <a:prstGeom prst="rect">
@@ -4281,7 +4281,7 @@
         </p:blipFill>
         <p:spPr>
           <a:xfrm>
-            <a:off x="5446624" y="3241548"/>
+            <a:off x="2622728" y="3241548"/>
             <a:ext cx="329184" cy="329184"/>
           </a:xfrm>
           <a:prstGeom prst="rect">
@@ -4305,7 +4305,7 @@
         </p:blipFill>
         <p:spPr>
           <a:xfrm>
-            <a:off x="8270519" y="3241548"/>
+            <a:off x="11094415" y="3241548"/>
             <a:ext cx="329184" cy="329184"/>
           </a:xfrm>
           <a:prstGeom prst="rect">
@@ -4329,7 +4329,7 @@
         </p:blipFill>
         <p:spPr>
           <a:xfrm>
-            <a:off x="11094415" y="3241548"/>
+            <a:off x="8270519" y="3241548"/>
             <a:ext cx="329184" cy="329184"/>
           </a:xfrm>
           <a:prstGeom prst="rect">
@@ -4497,7 +4497,7 @@
                   <a:srgbClr val="FFFFFF"/>
                 </a:solidFill>
               </a:rPr>
-              <a:t>O que aprendemos na aula 05.01</a:t>
+              <a:t>O que aprendemos na aula 04.01</a:t>
             </a:r>
             <a:endParaRPr lang="en-US" sz="3200" dirty="0"/>
           </a:p>
@@ -5005,7 +5005,7 @@
                   <a:srgbClr val="89D1FF"/>
                 </a:solidFill>
               </a:rPr>
-              <a:t>Próxima aula · 05.02  </a:t>
+              <a:t>Próxima aula · 04.02  </a:t>
             </a:r>
             <a:r>
               <a:rPr lang="en-US" sz="1500" dirty="0">
@@ -5131,7 +5131,7 @@
         </p:blipFill>
         <p:spPr>
           <a:xfrm>
-            <a:off x="6355080" y="3886200"/>
+            <a:off x="822960" y="3886200"/>
             <a:ext cx="256032" cy="256032"/>
           </a:xfrm>
           <a:prstGeom prst="rect">
@@ -5155,7 +5155,7 @@
         </p:blipFill>
         <p:spPr>
           <a:xfrm>
-            <a:off x="822960" y="3886200"/>
+            <a:off x="6355080" y="3886200"/>
             <a:ext cx="256032" cy="256032"/>
           </a:xfrm>
           <a:prstGeom prst="rect">
@@ -5282,7 +5282,7 @@
                   <a:srgbClr val="1D2D3E"/>
                 </a:solidFill>
               </a:rPr>
-              <a:t>Módulo 05 em 5 aulas: Clean Core e extensibilidade</a:t>
+              <a:t>Módulo 04 em 5 aulas: Clean Core e extensibilidade</a:t>
             </a:r>
             <a:endParaRPr lang="en-US" sz="2800" dirty="0"/>
           </a:p>
@@ -6238,7 +6238,7 @@
         </p:blipFill>
         <p:spPr>
           <a:xfrm>
-            <a:off x="2072579" y="1847088"/>
+            <a:off x="6583497" y="1847088"/>
             <a:ext cx="347472" cy="347472"/>
           </a:xfrm>
           <a:prstGeom prst="rect">
@@ -6262,7 +6262,7 @@
         </p:blipFill>
         <p:spPr>
           <a:xfrm>
-            <a:off x="4328038" y="1847088"/>
+            <a:off x="2072579" y="1847088"/>
             <a:ext cx="347472" cy="347472"/>
           </a:xfrm>
           <a:prstGeom prst="rect">
@@ -6286,7 +6286,7 @@
         </p:blipFill>
         <p:spPr>
           <a:xfrm>
-            <a:off x="6583497" y="1847088"/>
+            <a:off x="8838956" y="1847088"/>
             <a:ext cx="347472" cy="347472"/>
           </a:xfrm>
           <a:prstGeom prst="rect">
@@ -6310,7 +6310,7 @@
         </p:blipFill>
         <p:spPr>
           <a:xfrm>
-            <a:off x="11094415" y="1847088"/>
+            <a:off x="4328038" y="1847088"/>
             <a:ext cx="347472" cy="347472"/>
           </a:xfrm>
           <a:prstGeom prst="rect">
@@ -6334,7 +6334,7 @@
         </p:blipFill>
         <p:spPr>
           <a:xfrm>
-            <a:off x="8838956" y="1847088"/>
+            <a:off x="11094415" y="1847088"/>
             <a:ext cx="347472" cy="347472"/>
           </a:xfrm>
           <a:prstGeom prst="rect">
@@ -6923,7 +6923,7 @@
         </p:blipFill>
         <p:spPr>
           <a:xfrm>
-            <a:off x="850392" y="3310636"/>
+            <a:off x="8399069" y="3310636"/>
             <a:ext cx="256032" cy="256032"/>
           </a:xfrm>
           <a:prstGeom prst="rect">
@@ -6947,7 +6947,7 @@
         </p:blipFill>
         <p:spPr>
           <a:xfrm>
-            <a:off x="4624730" y="3310636"/>
+            <a:off x="850392" y="3310636"/>
             <a:ext cx="256032" cy="256032"/>
           </a:xfrm>
           <a:prstGeom prst="rect">
@@ -6971,7 +6971,7 @@
         </p:blipFill>
         <p:spPr>
           <a:xfrm>
-            <a:off x="8399069" y="3310636"/>
+            <a:off x="4624730" y="3310636"/>
             <a:ext cx="256032" cy="256032"/>
           </a:xfrm>
           <a:prstGeom prst="rect">
@@ -7101,7 +7101,7 @@
                   <a:srgbClr val="89D1FF"/>
                 </a:solidFill>
               </a:rPr>
-              <a:t>AULA 05.01 · SEÇÃO 1</a:t>
+              <a:t>AULA 04.01 · SEÇÃO 1</a:t>
             </a:r>
             <a:endParaRPr lang="en-US" sz="1300" dirty="0"/>
           </a:p>
@@ -8316,8 +8316,8 @@
         </p:blipFill>
         <p:spPr>
           <a:xfrm>
-            <a:off x="2077669" y="2084832"/>
-            <a:ext cx="365760" cy="365760"/>
+            <a:off x="8368711" y="3928994"/>
+            <a:ext cx="225308" cy="225308"/>
           </a:xfrm>
           <a:prstGeom prst="rect">
             <a:avLst/>
@@ -8340,7 +8340,7 @@
         </p:blipFill>
         <p:spPr>
           <a:xfrm>
-            <a:off x="5912968" y="2084832"/>
+            <a:off x="2077669" y="2084832"/>
             <a:ext cx="365760" cy="365760"/>
           </a:xfrm>
           <a:prstGeom prst="rect">
@@ -8388,8 +8388,8 @@
         </p:blipFill>
         <p:spPr>
           <a:xfrm>
-            <a:off x="820034" y="3928994"/>
-            <a:ext cx="225308" cy="225308"/>
+            <a:off x="5912968" y="2084832"/>
+            <a:ext cx="365760" cy="365760"/>
           </a:xfrm>
           <a:prstGeom prst="rect">
             <a:avLst/>
@@ -8412,7 +8412,7 @@
         </p:blipFill>
         <p:spPr>
           <a:xfrm>
-            <a:off x="4594372" y="3928994"/>
+            <a:off x="820034" y="3928994"/>
             <a:ext cx="225308" cy="225308"/>
           </a:xfrm>
           <a:prstGeom prst="rect">
@@ -8436,7 +8436,7 @@
         </p:blipFill>
         <p:spPr>
           <a:xfrm>
-            <a:off x="8368711" y="3928994"/>
+            <a:off x="4594372" y="3928994"/>
             <a:ext cx="225308" cy="225308"/>
           </a:xfrm>
           <a:prstGeom prst="rect">
@@ -9072,7 +9072,7 @@
         </p:blipFill>
         <p:spPr>
           <a:xfrm>
-            <a:off x="850392" y="2768727"/>
+            <a:off x="8399069" y="2768727"/>
             <a:ext cx="256032" cy="256032"/>
           </a:xfrm>
           <a:prstGeom prst="rect">
@@ -9096,7 +9096,7 @@
         </p:blipFill>
         <p:spPr>
           <a:xfrm>
-            <a:off x="4624730" y="2768727"/>
+            <a:off x="850392" y="2768727"/>
             <a:ext cx="256032" cy="256032"/>
           </a:xfrm>
           <a:prstGeom prst="rect">
@@ -9120,7 +9120,7 @@
         </p:blipFill>
         <p:spPr>
           <a:xfrm>
-            <a:off x="8399069" y="2768727"/>
+            <a:off x="4624730" y="2768727"/>
             <a:ext cx="256032" cy="256032"/>
           </a:xfrm>
           <a:prstGeom prst="rect">
@@ -9274,7 +9274,7 @@
                   <a:srgbClr val="89D1FF"/>
                 </a:solidFill>
               </a:rPr>
-              <a:t>AULA 05.01 · SEÇÃO 2</a:t>
+              <a:t>AULA 04.01 · SEÇÃO 2</a:t>
             </a:r>
             <a:endParaRPr lang="en-US" sz="1300" dirty="0"/>
           </a:p>
@@ -10267,7 +10267,7 @@
                   <a:srgbClr val="1D2D3E"/>
                 </a:solidFill>
               </a:rPr>
-              <a:t> (não recomendado). Detalhes na aula 05.05.</a:t>
+              <a:t> (não recomendado). Detalhes na aula 04.05.</a:t>
             </a:r>
             <a:endParaRPr lang="en-US" sz="1400" dirty="0"/>
           </a:p>
@@ -10289,8 +10289,8 @@
         </p:blipFill>
         <p:spPr>
           <a:xfrm>
-            <a:off x="6562192" y="2630043"/>
-            <a:ext cx="256032" cy="256032"/>
+            <a:off x="749808" y="5124069"/>
+            <a:ext cx="310896" cy="310896"/>
           </a:xfrm>
           <a:prstGeom prst="rect">
             <a:avLst/>
@@ -10337,8 +10337,8 @@
         </p:blipFill>
         <p:spPr>
           <a:xfrm>
-            <a:off x="749808" y="5124069"/>
-            <a:ext cx="310896" cy="310896"/>
+            <a:off x="6562192" y="2630043"/>
+            <a:ext cx="256032" cy="256032"/>
           </a:xfrm>
           <a:prstGeom prst="rect">
             <a:avLst/>
@@ -10467,7 +10467,7 @@
                   <a:srgbClr val="89D1FF"/>
                 </a:solidFill>
               </a:rPr>
-              <a:t>AULA 05.01 · SEÇÃO 3</a:t>
+              <a:t>AULA 04.01 · SEÇÃO 3</a:t>
             </a:r>
             <a:endParaRPr lang="en-US" sz="1300" dirty="0"/>
           </a:p>
